--- a/submission/01_演示PPT/作品演示PPT-最终版.pptx
+++ b/submission/01_演示PPT/作品演示PPT-最终版.pptx
@@ -862,7 +862,7 @@
           <a:lstStyle/>
           <a:p>
             <a:r>
-              <a:t>完整闭环已经跑通：选场景、两问画像、6 到 8 轮对抗、按 6 维 ECD 软素养评估、证据一致性校验、最后给出提升路径和报告。后端五张数据表、核心链路接口、包括越权拦截都已在代码级验证；全站 API 规模是 244 个操作、227 条路径，这是运行时 openapi 实测出来的，不是估的；认证覆盖率 94.65%。前端状态机、六维雷达和证据回放也都落地。这是演示里评委能直接看到的主路径。</a:t>
+              <a:t>完整闭环已经跑通：选场景、两问画像、6 到 8 轮对抗、按 6 维 ECD 软素养评估、证据一致性校验、最后给出提升路径和报告。后端五张数据表、核心链路接口、包括越权拦截都已在代码级验证；全站 API 规模是 244 个操作、227 条路径，这是运行时 openapi 实测出来的，不是估的；认证覆盖率 94.67%。前端状态机、六维雷达和证据回放也都落地。这是演示里评委能直接看到的主路径。</a:t>
             </a:r>
           </a:p>
         </p:txBody>
@@ -1072,7 +1072,7 @@
           <a:lstStyle/>
           <a:p>
             <a:r>
-              <a:t>我们不是只有 demo。技术底座已经拿到国家级大创立项，说明工程化能力是被认可的。更关键的是工程纪律：默认测试集 1389 项，1178 通过、208 跳过、3 个预期失败、零失败，覆盖率 54.96%，卡在 50 的门槛上；共识引擎实测均分 7.04、标准差 0.29，96 个样本、固定随机种子、6 个智能体，评委可以自己复现。和底座同源的知识图谱防伪证流水线，136 个节点、18 条边，验证报告自带 8 条机器检查守护，连"复现命令能不能在别人机器跑通"都有守护盯着。同一套"写下的结论必须能被机器复验"的纪律，同时保着两条产品线。这就是我们敢说"可信"的底气。</a:t>
+              <a:t>我们不是只有 demo。技术底座已经拿到国家级大创立项，说明工程化能力是被认可的。更关键的是工程纪律：CI 默认档 1428 项，1389 通过、38 跳过、1 个预期失败、零失败，覆盖率 54.96%，卡在 50 的门槛上；共识引擎实测均分 7.04、标准差 0.29，96 个样本、固定随机种子、6 个智能体，评委可以自己复现。和底座同源的知识图谱防伪证流水线，136 个节点、18 条边，验证报告自带 8 条机器检查守护，连"复现命令能不能在别人机器跑通"都有守护盯着。同一套"写下的结论必须能被机器复验"的纪律，同时保着两条产品线。这就是我们敢说"可信"的底气。</a:t>
             </a:r>
           </a:p>
         </p:txBody>
@@ -5690,7 +5690,7 @@
               </a:defRPr>
             </a:pPr>
             <a:r>
-              <a:t>    - 认证覆盖率 94.65%（230/243）</a:t>
+              <a:t>    - 认证覆盖率 94.67%（231/244）</a:t>
             </a:r>
           </a:p>
           <a:p>
@@ -6521,7 +6521,7 @@
               </a:defRPr>
             </a:pPr>
             <a:r>
-              <a:t>• 质量门禁可复现：默认测试集 1389 项 → 1178 passed / 208 skipped / 3 xfailed / 0 failed</a:t>
+              <a:t>• 质量门禁可复现：CI 默认档 1428 项 → 1389 passed / 38 skipped / 1 xfailed / 0 failed</a:t>
             </a:r>
           </a:p>
           <a:p>

--- a/submission/01_演示PPT/作品演示PPT-最终版.pptx
+++ b/submission/01_演示PPT/作品演示PPT-最终版.pptx
@@ -1072,7 +1072,7 @@
           <a:lstStyle/>
           <a:p>
             <a:r>
-              <a:t>我们不是只有 demo。技术底座已经拿到国家级大创立项，说明工程化能力是被认可的。更关键的是工程纪律：CI 默认档 1428 项，1389 通过、38 跳过、1 个预期失败、零失败，覆盖率 54.96%，卡在 50 的门槛上；共识引擎实测均分 7.04、标准差 0.29，96 个样本、固定随机种子、6 个智能体，评委可以自己复现。和底座同源的知识图谱防伪证流水线，136 个节点、18 条边，验证报告自带 8 条机器检查守护，连"复现命令能不能在别人机器跑通"都有守护盯着。同一套"写下的结论必须能被机器复验"的纪律，同时保着两条产品线。这就是我们敢说"可信"的底气。</a:t>
+              <a:t>我们不是只有 demo。技术底座已经拿到国家级大创立项，说明工程化能力是被认可的。更关键的是工程纪律：CI 默认档 1428 项，1389 通过、38 跳过、1 个预期失败、零失败，覆盖率 61%，超过 50 的门槛 11 个百分点；共识引擎实测均分 7.04、标准差 0.29，96 个样本、固定随机种子、6 个智能体，评委可以自己复现。和底座同源的知识图谱防伪证流水线，136 个节点、18 条边，验证报告自带 8 条机器检查守护，连"复现命令能不能在别人机器跑通"都有守护盯着。同一套"写下的结论必须能被机器复验"的纪律，同时保着两条产品线。这就是我们敢说"可信"的底气。</a:t>
             </a:r>
           </a:p>
         </p:txBody>
@@ -6540,7 +6540,7 @@
               </a:defRPr>
             </a:pPr>
             <a:r>
-              <a:t>    - CI p0 档 67 条；覆盖率 54.96%（门禁 --cov-fail-under=50）</a:t>
+              <a:t>    - CI p0 档 67 条；覆盖率 61%（门禁 --cov-fail-under=50，余量 11pp）</a:t>
             </a:r>
           </a:p>
           <a:p>

--- a/submission/01_演示PPT/作品演示PPT-最终版.pptx
+++ b/submission/01_演示PPT/作品演示PPT-最终版.pptx
@@ -862,7 +862,7 @@
           <a:lstStyle/>
           <a:p>
             <a:r>
-              <a:t>完整闭环已经跑通：选场景、两问画像、6 到 8 轮对抗、按 6 维 ECD 软素养评估、证据一致性校验、最后给出提升路径和报告。后端五张数据表、核心链路接口、包括越权拦截都已在代码级验证；全站 API 规模是 244 个操作、227 条路径，这是运行时 openapi 实测出来的，不是估的；认证覆盖率 94.67%。前端状态机、六维雷达和证据回放也都落地。这是演示里评委能直接看到的主路径。</a:t>
+              <a:t>完整闭环已经跑通：选场景、两问画像、6 到 8 轮对抗、按 6 维 ECD 软素养评估、证据一致性校验、最后给出提升路径和报告。后端五张数据表、核心链路接口、包括越权拦截都已在代码级验证；全站 API 规模是 261 个操作、243 条路径，这是运行时 openapi 实测出来的，不是估的；认证覆盖率 95.02%。前端状态机、六维雷达和证据回放也都落地。这是演示里评委能直接看到的主路径。</a:t>
             </a:r>
           </a:p>
         </p:txBody>
@@ -1072,7 +1072,7 @@
           <a:lstStyle/>
           <a:p>
             <a:r>
-              <a:t>我们不是只有 demo。技术底座已经拿到国家级大创立项，说明工程化能力是被认可的。更关键的是工程纪律：CI 默认档 1428 项，1389 通过、38 跳过、1 个预期失败、零失败，覆盖率 61%，超过 50 的门槛 11 个百分点；共识引擎实测均分 7.04、标准差 0.29，96 个样本、固定随机种子、6 个智能体，评委可以自己复现。和底座同源的知识图谱防伪证流水线，136 个节点、18 条边，验证报告自带 8 条机器检查守护，连"复现命令能不能在别人机器跑通"都有守护盯着。同一套"写下的结论必须能被机器复验"的纪律，同时保着两条产品线。这就是我们敢说"可信"的底气。</a:t>
+              <a:t>我们不是只有 demo。技术底座已经拿到国家级大创立项，说明工程化能力是被认可的。更关键的是工程纪律：CI 默认档 1732 run（1741 collected），1693 通过、38 跳过、1 个预期失败、零失败，覆盖率 57.19%，超过 50 的门槛 7.189999999999998 个百分点；共识引擎实测均分 7.04、标准差 0.29，96 个样本、固定随机种子、6 个智能体，评委可以自己复现。和底座同源的知识图谱防伪证流水线，136 个节点、18 条边，验证报告自带 8 条机器检查守护，连"复现命令能不能在别人机器跑通"都有守护盯着。同一套"写下的结论必须能被机器复验"的纪律，同时保着两条产品线。这就是我们敢说"可信"的底气。</a:t>
             </a:r>
           </a:p>
         </p:txBody>
@@ -5671,7 +5671,7 @@
               </a:defRPr>
             </a:pPr>
             <a:r>
-              <a:t>    - 全站 API 规模：244 operations / 227 paths（app.openapi() 运行时实测）</a:t>
+              <a:t>    - 全站 API 规模：261 operations / 243 paths（app.openapi() 运行时实测）</a:t>
             </a:r>
           </a:p>
           <a:p>
@@ -5690,7 +5690,7 @@
               </a:defRPr>
             </a:pPr>
             <a:r>
-              <a:t>    - 认证覆盖率 94.67%（231/244）</a:t>
+              <a:t>    - 认证覆盖率 95.02%（248/261）</a:t>
             </a:r>
           </a:p>
           <a:p>
@@ -6521,7 +6521,7 @@
               </a:defRPr>
             </a:pPr>
             <a:r>
-              <a:t>• 质量门禁可复现：CI 默认档 1428 项 → 1389 passed / 38 skipped / 1 xfailed / 0 failed</a:t>
+              <a:t>• 质量门禁可复现：CI 默认档 1732 run（1741 collected）→ 1693 passed / 38 skipped / 1 xfailed / 0 failed</a:t>
             </a:r>
           </a:p>
           <a:p>
@@ -6540,7 +6540,7 @@
               </a:defRPr>
             </a:pPr>
             <a:r>
-              <a:t>    - CI p0 档 67 条；覆盖率 61%（门禁 --cov-fail-under=50，余量 11pp）</a:t>
+              <a:t>    - CI p0 档 67 条；覆盖率 57.19%（门禁 --cov-fail-under=50，余量 7.189999999999998pp）</a:t>
             </a:r>
           </a:p>
           <a:p>

--- a/submission/01_演示PPT/作品演示PPT-最终版.pptx
+++ b/submission/01_演示PPT/作品演示PPT-最终版.pptx
@@ -1072,7 +1072,7 @@
           <a:lstStyle/>
           <a:p>
             <a:r>
-              <a:t>我们不是只有 demo。技术底座已经拿到国家级大创立项，说明工程化能力是被认可的。更关键的是工程纪律：CI 默认档 1732 run（1741 collected），1693 通过、38 跳过、1 个预期失败、零失败，覆盖率 57.19%，超过 50 的门槛 7.189999999999998 个百分点；共识引擎实测均分 7.04、标准差 0.29，96 个样本、固定随机种子、6 个智能体，评委可以自己复现。和底座同源的知识图谱防伪证流水线，136 个节点、18 条边，验证报告自带 8 条机器检查守护，连"复现命令能不能在别人机器跑通"都有守护盯着。同一套"写下的结论必须能被机器复验"的纪律，同时保着两条产品线。这就是我们敢说"可信"的底气。</a:t>
+              <a:t>我们不是只有 demo。技术底座已经拿到国家级大创立项，说明工程化能力是被认可的。更关键的是工程纪律：CI 默认档 1776 run（1785 collected），1737 通过、38 跳过、1 个预期失败、零失败，覆盖率 57.19%，超过 50 的门槛 7.189999999999998 个百分点；共识引擎实测均分 7.04、标准差 0.29，96 个样本、固定随机种子、6 个智能体，评委可以自己复现。和底座同源的知识图谱防伪证流水线，136 个节点、18 条边，验证报告自带 8 条机器检查守护，连"复现命令能不能在别人机器跑通"都有守护盯着。同一套"写下的结论必须能被机器复验"的纪律，同时保着两条产品线。这就是我们敢说"可信"的底气。</a:t>
             </a:r>
           </a:p>
         </p:txBody>
@@ -6521,7 +6521,7 @@
               </a:defRPr>
             </a:pPr>
             <a:r>
-              <a:t>• 质量门禁可复现：CI 默认档 1732 run（1741 collected）→ 1693 passed / 38 skipped / 1 xfailed / 0 failed</a:t>
+              <a:t>• 质量门禁可复现：CI 默认档 1776 run（1785 collected）→ 1737 passed / 38 skipped / 1 xfailed / 0 failed</a:t>
             </a:r>
           </a:p>
           <a:p>
